--- a/slides/section_06.pptx
+++ b/slides/section_06.pptx
@@ -4175,8 +4175,8 @@
         </p:nvSpPr>
         <p:spPr>
           <a:xfrm>
-            <a:off x="6035040" y="3017520"/>
-            <a:ext cx="-28112" cy="285425"/>
+            <a:off x="6006928" y="3017520"/>
+            <a:ext cx="28112" cy="285425"/>
           </a:xfrm>
           <a:prstGeom prst="line">
             <a:avLst/>
@@ -4198,8 +4198,8 @@
         </p:nvSpPr>
         <p:spPr>
           <a:xfrm>
-            <a:off x="6006928" y="3302945"/>
-            <a:ext cx="-83255" cy="274456"/>
+            <a:off x="5923673" y="3302945"/>
+            <a:ext cx="83255" cy="274456"/>
           </a:xfrm>
           <a:prstGeom prst="line">
             <a:avLst/>
@@ -4221,8 +4221,8 @@
         </p:nvSpPr>
         <p:spPr>
           <a:xfrm>
-            <a:off x="5923673" y="3577401"/>
-            <a:ext cx="-135199" cy="252940"/>
+            <a:off x="5788473" y="3577401"/>
+            <a:ext cx="135199" cy="252940"/>
           </a:xfrm>
           <a:prstGeom prst="line">
             <a:avLst/>
@@ -4244,8 +4244,8 @@
         </p:nvSpPr>
         <p:spPr>
           <a:xfrm>
-            <a:off x="5788473" y="3830341"/>
-            <a:ext cx="-181948" cy="221704"/>
+            <a:off x="5606526" y="3830341"/>
+            <a:ext cx="181948" cy="221704"/>
           </a:xfrm>
           <a:prstGeom prst="line">
             <a:avLst/>
@@ -4267,8 +4267,8 @@
         </p:nvSpPr>
         <p:spPr>
           <a:xfrm>
-            <a:off x="5606526" y="4052046"/>
-            <a:ext cx="-221704" cy="181948"/>
+            <a:off x="5384821" y="4052046"/>
+            <a:ext cx="221704" cy="181948"/>
           </a:xfrm>
           <a:prstGeom prst="line">
             <a:avLst/>
@@ -4290,8 +4290,8 @@
         </p:nvSpPr>
         <p:spPr>
           <a:xfrm>
-            <a:off x="5384821" y="4233993"/>
-            <a:ext cx="-252940" cy="135199"/>
+            <a:off x="5131881" y="4233993"/>
+            <a:ext cx="252940" cy="135199"/>
           </a:xfrm>
           <a:prstGeom prst="line">
             <a:avLst/>
@@ -4313,8 +4313,8 @@
         </p:nvSpPr>
         <p:spPr>
           <a:xfrm>
-            <a:off x="5131881" y="4369193"/>
-            <a:ext cx="-274456" cy="83255"/>
+            <a:off x="4857425" y="4369193"/>
+            <a:ext cx="274456" cy="83255"/>
           </a:xfrm>
           <a:prstGeom prst="line">
             <a:avLst/>
@@ -4336,8 +4336,8 @@
         </p:nvSpPr>
         <p:spPr>
           <a:xfrm>
-            <a:off x="4857425" y="4452448"/>
-            <a:ext cx="-285425" cy="28112"/>
+            <a:off x="4572000" y="4452448"/>
+            <a:ext cx="285425" cy="28112"/>
           </a:xfrm>
           <a:prstGeom prst="line">
             <a:avLst/>
@@ -4360,8 +4360,8 @@
         </p:nvSpPr>
         <p:spPr>
           <a:xfrm>
-            <a:off x="4572000" y="4480560"/>
-            <a:ext cx="-285425" cy="-28112"/>
+            <a:off x="4286575" y="4452448"/>
+            <a:ext cx="285425" cy="28112"/>
           </a:xfrm>
           <a:prstGeom prst="line">
             <a:avLst/>
@@ -4383,8 +4383,8 @@
         </p:nvSpPr>
         <p:spPr>
           <a:xfrm>
-            <a:off x="4286575" y="4452448"/>
-            <a:ext cx="-274456" cy="-83255"/>
+            <a:off x="4012119" y="4369193"/>
+            <a:ext cx="274456" cy="83255"/>
           </a:xfrm>
           <a:prstGeom prst="line">
             <a:avLst/>
@@ -4406,8 +4406,8 @@
         </p:nvSpPr>
         <p:spPr>
           <a:xfrm>
-            <a:off x="4012119" y="4369193"/>
-            <a:ext cx="-252940" cy="-135199"/>
+            <a:off x="3759179" y="4233993"/>
+            <a:ext cx="252940" cy="135199"/>
           </a:xfrm>
           <a:prstGeom prst="line">
             <a:avLst/>
@@ -4429,8 +4429,8 @@
         </p:nvSpPr>
         <p:spPr>
           <a:xfrm>
-            <a:off x="3759179" y="4233993"/>
-            <a:ext cx="-221704" cy="-181948"/>
+            <a:off x="3537474" y="4052046"/>
+            <a:ext cx="221704" cy="181948"/>
           </a:xfrm>
           <a:prstGeom prst="line">
             <a:avLst/>
@@ -4452,8 +4452,8 @@
         </p:nvSpPr>
         <p:spPr>
           <a:xfrm>
-            <a:off x="3537474" y="4052046"/>
-            <a:ext cx="-181948" cy="-221704"/>
+            <a:off x="3355527" y="3830341"/>
+            <a:ext cx="181948" cy="221704"/>
           </a:xfrm>
           <a:prstGeom prst="line">
             <a:avLst/>
@@ -4475,8 +4475,8 @@
         </p:nvSpPr>
         <p:spPr>
           <a:xfrm>
-            <a:off x="3355527" y="3830341"/>
-            <a:ext cx="-135199" cy="-252940"/>
+            <a:off x="3220327" y="3577401"/>
+            <a:ext cx="135199" cy="252940"/>
           </a:xfrm>
           <a:prstGeom prst="line">
             <a:avLst/>
@@ -4498,8 +4498,8 @@
         </p:nvSpPr>
         <p:spPr>
           <a:xfrm>
-            <a:off x="3220327" y="3577401"/>
-            <a:ext cx="-83255" cy="-274456"/>
+            <a:off x="3137072" y="3302945"/>
+            <a:ext cx="83255" cy="274456"/>
           </a:xfrm>
           <a:prstGeom prst="line">
             <a:avLst/>
@@ -4521,8 +4521,8 @@
         </p:nvSpPr>
         <p:spPr>
           <a:xfrm>
-            <a:off x="3137072" y="3302945"/>
-            <a:ext cx="-28112" cy="-285425"/>
+            <a:off x="3108960" y="3017520"/>
+            <a:ext cx="28112" cy="285425"/>
           </a:xfrm>
           <a:prstGeom prst="line">
             <a:avLst/>
@@ -4545,8 +4545,8 @@
         </p:nvSpPr>
         <p:spPr>
           <a:xfrm>
-            <a:off x="3108960" y="3017520"/>
-            <a:ext cx="28112" cy="-285425"/>
+            <a:off x="3108960" y="2732095"/>
+            <a:ext cx="28112" cy="285425"/>
           </a:xfrm>
           <a:prstGeom prst="line">
             <a:avLst/>
@@ -4568,8 +4568,8 @@
         </p:nvSpPr>
         <p:spPr>
           <a:xfrm>
-            <a:off x="3137072" y="2732095"/>
-            <a:ext cx="83255" cy="-274456"/>
+            <a:off x="3137072" y="2457639"/>
+            <a:ext cx="83255" cy="274456"/>
           </a:xfrm>
           <a:prstGeom prst="line">
             <a:avLst/>
@@ -4591,8 +4591,8 @@
         </p:nvSpPr>
         <p:spPr>
           <a:xfrm>
-            <a:off x="3220327" y="2457639"/>
-            <a:ext cx="135199" cy="-252940"/>
+            <a:off x="3220327" y="2204699"/>
+            <a:ext cx="135199" cy="252940"/>
           </a:xfrm>
           <a:prstGeom prst="line">
             <a:avLst/>
@@ -4614,8 +4614,8 @@
         </p:nvSpPr>
         <p:spPr>
           <a:xfrm>
-            <a:off x="3355527" y="2204699"/>
-            <a:ext cx="181948" cy="-221704"/>
+            <a:off x="3355527" y="1982994"/>
+            <a:ext cx="181948" cy="221704"/>
           </a:xfrm>
           <a:prstGeom prst="line">
             <a:avLst/>
@@ -4637,8 +4637,8 @@
         </p:nvSpPr>
         <p:spPr>
           <a:xfrm>
-            <a:off x="3537474" y="1982994"/>
-            <a:ext cx="221704" cy="-181948"/>
+            <a:off x="3537474" y="1801047"/>
+            <a:ext cx="221704" cy="181948"/>
           </a:xfrm>
           <a:prstGeom prst="line">
             <a:avLst/>
@@ -4660,8 +4660,8 @@
         </p:nvSpPr>
         <p:spPr>
           <a:xfrm>
-            <a:off x="3759179" y="1801047"/>
-            <a:ext cx="252940" cy="-135199"/>
+            <a:off x="3759179" y="1665847"/>
+            <a:ext cx="252940" cy="135199"/>
           </a:xfrm>
           <a:prstGeom prst="line">
             <a:avLst/>
@@ -4683,8 +4683,8 @@
         </p:nvSpPr>
         <p:spPr>
           <a:xfrm>
-            <a:off x="4012119" y="1665847"/>
-            <a:ext cx="274456" cy="-83255"/>
+            <a:off x="4012119" y="1582592"/>
+            <a:ext cx="274456" cy="83255"/>
           </a:xfrm>
           <a:prstGeom prst="line">
             <a:avLst/>
@@ -4706,8 +4706,8 @@
         </p:nvSpPr>
         <p:spPr>
           <a:xfrm>
-            <a:off x="4286575" y="1582592"/>
-            <a:ext cx="285425" cy="-28112"/>
+            <a:off x="4286575" y="1554480"/>
+            <a:ext cx="285425" cy="28112"/>
           </a:xfrm>
           <a:prstGeom prst="line">
             <a:avLst/>
